--- a/Presentacio/Catalan/Defensa_TFG_Arnau.pptx
+++ b/Presentacio/Catalan/Defensa_TFG_Arnau.pptx
@@ -211,7 +211,7 @@
           </a:lstStyle>
           <a:p>
             <a:fld id="{3D171EB8-DCAB-4648-A104-EB7323203DAC}" type="datetimeFigureOut">
-              <a:t>07/07/2026</a:t>
+              <a:t>14/07/2026</a:t>
             </a:fld>
             <a:endParaRPr lang="es-ES"/>
           </a:p>
@@ -3263,7 +3263,7 @@
                 <a:ea typeface="Calibri" pitchFamily="34" charset="-122"/>
                 <a:cs typeface="Calibri" pitchFamily="34" charset="-120"/>
               </a:rPr>
-              <a:t>Filtre Mahony MARG (complementari) per a actitud i rumb en temps real.</a:t>
+              <a:t>Filtre Mahony MARG per a actitud i rumb en temps real.</a:t>
             </a:r>
             <a:endParaRPr lang="ca-ES" sz="1350" dirty="0"/>
           </a:p>
@@ -3316,6 +3316,22 @@
               </a:spcAft>
               <a:buNone/>
             </a:pPr>
+            <a:endParaRPr lang="ca-ES" sz="1350" b="1" dirty="0">
+              <a:solidFill>
+                <a:srgbClr val="0E2244"/>
+              </a:solidFill>
+              <a:latin typeface="Calibri" pitchFamily="34" charset="0"/>
+              <a:ea typeface="Calibri" pitchFamily="34" charset="-122"/>
+              <a:cs typeface="Calibri" pitchFamily="34" charset="-120"/>
+            </a:endParaRPr>
+          </a:p>
+          <a:p>
+            <a:pPr marL="0" indent="0" algn="l">
+              <a:spcAft>
+                <a:spcPts val="1000"/>
+              </a:spcAft>
+              <a:buNone/>
+            </a:pPr>
             <a:r>
               <a:rPr lang="ca-ES" sz="1350" b="1" dirty="0">
                 <a:solidFill>
@@ -3325,7 +3341,7 @@
                 <a:ea typeface="Calibri" pitchFamily="34" charset="-122"/>
                 <a:cs typeface="Calibri" pitchFamily="34" charset="-120"/>
               </a:rPr>
-              <a:t>Kp = 3,0   ·   Ki = 1,0   ·   fusió a 100 Hz</a:t>
+              <a:t>	Kp = 3,0   ·   Ki = 1,0   ·   fusió a 100 Hz</a:t>
             </a:r>
             <a:endParaRPr lang="ca-ES" sz="1350" dirty="0"/>
           </a:p>
@@ -5663,7 +5679,7 @@
         </p:nvSpPr>
         <p:spPr>
           <a:xfrm>
-            <a:off x="5532120" y="4160520"/>
+            <a:off x="5532120" y="4398264"/>
             <a:ext cx="3200400" cy="548640"/>
           </a:xfrm>
           <a:prstGeom prst="rect">
@@ -5688,7 +5704,7 @@
                 <a:ea typeface="Calibri" pitchFamily="34" charset="-122"/>
                 <a:cs typeface="Calibri" pitchFamily="34" charset="-120"/>
               </a:rPr>
-              <a:t>Disposició Basic-T conforme al patró de l'AC 25-11B (RN01). Tanca la cadena del sensor a la pantalla.</a:t>
+              <a:t>Disposició Basic-T conforme al patró de l'AC 25-11B (RN01).</a:t>
             </a:r>
             <a:endParaRPr lang="ca-ES" sz="1100" dirty="0"/>
           </a:p>
@@ -6000,7 +6016,7 @@
                 <a:ea typeface="Calibri" pitchFamily="34" charset="-122"/>
                 <a:cs typeface="Calibri" pitchFamily="34" charset="-120"/>
               </a:rPr>
-              <a:t>Tessel·les precarregades a disc; la descàrrega en línia sota demanda queda com a treball futur.</a:t>
+              <a:t>Tessel·les precarregades a disc, la descàrrega en línia sota demanda queda com a treball futur.</a:t>
             </a:r>
             <a:endParaRPr lang="ca-ES" sz="1100" dirty="0"/>
           </a:p>
@@ -8145,45 +8161,6 @@
           </a:graphicData>
         </a:graphic>
       </p:graphicFrame>
-      <p:sp>
-        <p:nvSpPr>
-          <p:cNvPr id="6" name="Text 2"/>
-          <p:cNvSpPr/>
-          <p:nvPr/>
-        </p:nvSpPr>
-        <p:spPr>
-          <a:xfrm>
-            <a:off x="457200" y="4434840"/>
-            <a:ext cx="8229600" cy="320040"/>
-          </a:xfrm>
-          <a:prstGeom prst="rect">
-            <a:avLst/>
-          </a:prstGeom>
-          <a:noFill/>
-          <a:ln/>
-        </p:spPr>
-        <p:txBody>
-          <a:bodyPr wrap="square" lIns="0" tIns="0" rIns="0" bIns="0" rtlCol="0" anchor="ctr"/>
-          <a:lstStyle/>
-          <a:p>
-            <a:pPr marL="0" indent="0">
-              <a:buNone/>
-            </a:pPr>
-            <a:r>
-              <a:rPr lang="ca-ES" sz="1150" i="1" dirty="0">
-                <a:solidFill>
-                  <a:srgbClr val="5E6F80"/>
-                </a:solidFill>
-                <a:latin typeface="Calibri" pitchFamily="34" charset="0"/>
-                <a:ea typeface="Calibri" pitchFamily="34" charset="-122"/>
-                <a:cs typeface="Calibri" pitchFamily="34" charset="-120"/>
-              </a:rPr>
-              <a:t>Tots els requisits funcionals (RF01-RF09) també queden coberts amb el sistema integrat.</a:t>
-            </a:r>
-            <a:endParaRPr lang="ca-ES" sz="1150" dirty="0"/>
-          </a:p>
-        </p:txBody>
-      </p:sp>
     </p:spTree>
   </p:cSld>
   <p:clrMapOvr>
@@ -13226,7 +13203,7 @@
         </p:nvSpPr>
         <p:spPr>
           <a:xfrm>
-            <a:off x="393192" y="2331720"/>
+            <a:off x="331797" y="2372869"/>
             <a:ext cx="1316736" cy="1325880"/>
           </a:xfrm>
           <a:prstGeom prst="roundRect">
@@ -13255,6 +13232,7 @@
           <a:bodyPr/>
           <a:lstStyle/>
           <a:p>
+            <a:pPr algn="ctr"/>
             <a:endParaRPr lang="ca-ES"/>
           </a:p>
         </p:txBody>
@@ -13267,7 +13245,7 @@
         </p:nvSpPr>
         <p:spPr>
           <a:xfrm>
-            <a:off x="393192" y="2331720"/>
+            <a:off x="347472" y="2361130"/>
             <a:ext cx="1316736" cy="1325880"/>
           </a:xfrm>
           <a:prstGeom prst="rect">
@@ -13340,7 +13318,7 @@
         </p:nvSpPr>
         <p:spPr>
           <a:xfrm>
-            <a:off x="1911096" y="2331720"/>
+            <a:off x="1970532" y="2336201"/>
             <a:ext cx="1207008" cy="1325880"/>
           </a:xfrm>
           <a:prstGeom prst="roundRect">
@@ -13369,6 +13347,7 @@
           <a:bodyPr/>
           <a:lstStyle/>
           <a:p>
+            <a:pPr algn="ctr"/>
             <a:endParaRPr lang="ca-ES"/>
           </a:p>
         </p:txBody>
@@ -13381,7 +13360,7 @@
         </p:nvSpPr>
         <p:spPr>
           <a:xfrm>
-            <a:off x="1911096" y="2331720"/>
+            <a:off x="1970532" y="2336201"/>
             <a:ext cx="1207008" cy="1325880"/>
           </a:xfrm>
           <a:prstGeom prst="rect">
@@ -13437,7 +13416,7 @@
         </p:nvSpPr>
         <p:spPr>
           <a:xfrm>
-            <a:off x="3319992" y="2331720"/>
+            <a:off x="3379428" y="2336201"/>
             <a:ext cx="1207008" cy="1325880"/>
           </a:xfrm>
           <a:prstGeom prst="roundRect">
@@ -13466,6 +13445,7 @@
           <a:bodyPr/>
           <a:lstStyle/>
           <a:p>
+            <a:pPr algn="ctr"/>
             <a:endParaRPr lang="ca-ES"/>
           </a:p>
         </p:txBody>
@@ -13478,7 +13458,7 @@
         </p:nvSpPr>
         <p:spPr>
           <a:xfrm>
-            <a:off x="3319992" y="2331720"/>
+            <a:off x="3379428" y="2336201"/>
             <a:ext cx="1207008" cy="1325880"/>
           </a:xfrm>
           <a:prstGeom prst="rect">
@@ -13534,7 +13514,7 @@
         </p:nvSpPr>
         <p:spPr>
           <a:xfrm>
-            <a:off x="6135624" y="2331720"/>
+            <a:off x="6195060" y="2336201"/>
             <a:ext cx="1207008" cy="1325880"/>
           </a:xfrm>
           <a:prstGeom prst="roundRect">
@@ -13563,6 +13543,7 @@
           <a:bodyPr/>
           <a:lstStyle/>
           <a:p>
+            <a:pPr algn="ctr"/>
             <a:endParaRPr lang="ca-ES"/>
           </a:p>
         </p:txBody>
@@ -13575,7 +13556,7 @@
         </p:nvSpPr>
         <p:spPr>
           <a:xfrm>
-            <a:off x="6135624" y="2331720"/>
+            <a:off x="6195060" y="2336201"/>
             <a:ext cx="1207008" cy="1325880"/>
           </a:xfrm>
           <a:prstGeom prst="rect">
@@ -13631,7 +13612,7 @@
         </p:nvSpPr>
         <p:spPr>
           <a:xfrm>
-            <a:off x="7543800" y="2331720"/>
+            <a:off x="7603236" y="2336201"/>
             <a:ext cx="1207008" cy="1325880"/>
           </a:xfrm>
           <a:prstGeom prst="roundRect">
@@ -13660,6 +13641,7 @@
           <a:bodyPr/>
           <a:lstStyle/>
           <a:p>
+            <a:pPr algn="ctr"/>
             <a:endParaRPr lang="ca-ES"/>
           </a:p>
         </p:txBody>
@@ -13672,7 +13654,7 @@
         </p:nvSpPr>
         <p:spPr>
           <a:xfrm>
-            <a:off x="7543800" y="2331720"/>
+            <a:off x="7603236" y="2336201"/>
             <a:ext cx="1207008" cy="1325880"/>
           </a:xfrm>
           <a:prstGeom prst="rect">
@@ -13728,8 +13710,8 @@
         </p:nvSpPr>
         <p:spPr>
           <a:xfrm>
-            <a:off x="1728216" y="2994660"/>
-            <a:ext cx="164592" cy="0"/>
+            <a:off x="1692293" y="2999141"/>
+            <a:ext cx="259951" cy="0"/>
           </a:xfrm>
           <a:prstGeom prst="line">
             <a:avLst/>
@@ -13746,6 +13728,7 @@
           <a:bodyPr/>
           <a:lstStyle/>
           <a:p>
+            <a:pPr algn="ctr"/>
             <a:endParaRPr lang="ca-ES"/>
           </a:p>
         </p:txBody>
@@ -13758,8 +13741,8 @@
         </p:nvSpPr>
         <p:spPr>
           <a:xfrm>
-            <a:off x="1719072" y="2848356"/>
-            <a:ext cx="182880" cy="274320"/>
+            <a:off x="1596995" y="2852837"/>
+            <a:ext cx="440750" cy="274320"/>
           </a:xfrm>
           <a:prstGeom prst="rect">
             <a:avLst/>
@@ -13797,7 +13780,7 @@
         </p:nvSpPr>
         <p:spPr>
           <a:xfrm>
-            <a:off x="1609344" y="2610612"/>
+            <a:off x="1618649" y="2514509"/>
             <a:ext cx="402336" cy="274320"/>
           </a:xfrm>
           <a:prstGeom prst="rect">
@@ -13836,7 +13819,7 @@
         </p:nvSpPr>
         <p:spPr>
           <a:xfrm>
-            <a:off x="3136392" y="2994660"/>
+            <a:off x="3195828" y="2999141"/>
             <a:ext cx="164592" cy="0"/>
           </a:xfrm>
           <a:prstGeom prst="line">
@@ -13854,6 +13837,7 @@
           <a:bodyPr/>
           <a:lstStyle/>
           <a:p>
+            <a:pPr algn="ctr"/>
             <a:endParaRPr lang="ca-ES"/>
           </a:p>
         </p:txBody>
@@ -13866,7 +13850,7 @@
         </p:nvSpPr>
         <p:spPr>
           <a:xfrm>
-            <a:off x="3127248" y="2848356"/>
+            <a:off x="3186684" y="2852837"/>
             <a:ext cx="182880" cy="274320"/>
           </a:xfrm>
           <a:prstGeom prst="rect">
@@ -13905,7 +13889,7 @@
         </p:nvSpPr>
         <p:spPr>
           <a:xfrm>
-            <a:off x="3017520" y="2610612"/>
+            <a:off x="3076956" y="2615093"/>
             <a:ext cx="402336" cy="274320"/>
           </a:xfrm>
           <a:prstGeom prst="rect">
@@ -13944,7 +13928,7 @@
         </p:nvSpPr>
         <p:spPr>
           <a:xfrm>
-            <a:off x="4544568" y="2994660"/>
+            <a:off x="4604004" y="2999141"/>
             <a:ext cx="164592" cy="0"/>
           </a:xfrm>
           <a:prstGeom prst="line">
@@ -13962,6 +13946,7 @@
           <a:bodyPr/>
           <a:lstStyle/>
           <a:p>
+            <a:pPr algn="ctr"/>
             <a:endParaRPr lang="ca-ES"/>
           </a:p>
         </p:txBody>
@@ -13974,7 +13959,7 @@
         </p:nvSpPr>
         <p:spPr>
           <a:xfrm>
-            <a:off x="4535424" y="2848356"/>
+            <a:off x="4594860" y="2852837"/>
             <a:ext cx="182880" cy="274320"/>
           </a:xfrm>
           <a:prstGeom prst="rect">
@@ -14013,7 +13998,7 @@
         </p:nvSpPr>
         <p:spPr>
           <a:xfrm>
-            <a:off x="4425696" y="2610612"/>
+            <a:off x="4485132" y="2615093"/>
             <a:ext cx="402336" cy="274320"/>
           </a:xfrm>
           <a:prstGeom prst="rect">
@@ -14052,7 +14037,7 @@
         </p:nvSpPr>
         <p:spPr>
           <a:xfrm>
-            <a:off x="5952744" y="2994660"/>
+            <a:off x="6012180" y="2999141"/>
             <a:ext cx="164592" cy="0"/>
           </a:xfrm>
           <a:prstGeom prst="line">
@@ -14070,6 +14055,7 @@
           <a:bodyPr/>
           <a:lstStyle/>
           <a:p>
+            <a:pPr algn="ctr"/>
             <a:endParaRPr lang="ca-ES"/>
           </a:p>
         </p:txBody>
@@ -14082,7 +14068,7 @@
         </p:nvSpPr>
         <p:spPr>
           <a:xfrm>
-            <a:off x="5943600" y="2848356"/>
+            <a:off x="6003036" y="2852837"/>
             <a:ext cx="182880" cy="274320"/>
           </a:xfrm>
           <a:prstGeom prst="rect">
@@ -14121,7 +14107,7 @@
         </p:nvSpPr>
         <p:spPr>
           <a:xfrm>
-            <a:off x="5833872" y="2610612"/>
+            <a:off x="5893308" y="2615093"/>
             <a:ext cx="402336" cy="274320"/>
           </a:xfrm>
           <a:prstGeom prst="rect">
@@ -14199,7 +14185,7 @@
         </p:nvSpPr>
         <p:spPr>
           <a:xfrm>
-            <a:off x="4727448" y="2331720"/>
+            <a:off x="4786884" y="2336201"/>
             <a:ext cx="1207008" cy="1325880"/>
           </a:xfrm>
           <a:prstGeom prst="roundRect">
@@ -14228,6 +14214,7 @@
           <a:bodyPr/>
           <a:lstStyle/>
           <a:p>
+            <a:pPr algn="ctr"/>
             <a:endParaRPr lang="ca-ES"/>
           </a:p>
         </p:txBody>
@@ -14240,7 +14227,7 @@
         </p:nvSpPr>
         <p:spPr>
           <a:xfrm>
-            <a:off x="4727448" y="2331720"/>
+            <a:off x="4786884" y="2336201"/>
             <a:ext cx="1207008" cy="1325880"/>
           </a:xfrm>
           <a:prstGeom prst="rect">
@@ -14296,7 +14283,7 @@
         </p:nvSpPr>
         <p:spPr>
           <a:xfrm>
-            <a:off x="7360920" y="2994660"/>
+            <a:off x="7420356" y="2999141"/>
             <a:ext cx="164592" cy="0"/>
           </a:xfrm>
           <a:prstGeom prst="line">
@@ -14314,6 +14301,7 @@
           <a:bodyPr/>
           <a:lstStyle/>
           <a:p>
+            <a:pPr algn="ctr"/>
             <a:endParaRPr lang="ca-ES"/>
           </a:p>
         </p:txBody>
@@ -14326,7 +14314,7 @@
         </p:nvSpPr>
         <p:spPr>
           <a:xfrm>
-            <a:off x="7351776" y="2848356"/>
+            <a:off x="7411212" y="2852837"/>
             <a:ext cx="182880" cy="274320"/>
           </a:xfrm>
           <a:prstGeom prst="rect">
@@ -14365,7 +14353,7 @@
         </p:nvSpPr>
         <p:spPr>
           <a:xfrm>
-            <a:off x="7242048" y="2610612"/>
+            <a:off x="7301484" y="2615093"/>
             <a:ext cx="402336" cy="274320"/>
           </a:xfrm>
           <a:prstGeom prst="rect">
@@ -14923,45 +14911,6 @@
               </a:rPr>
               <a:t>Paraula de 32 bits ja estructurada; sense dissenyar un format des de zero.</a:t>
             </a:r>
-          </a:p>
-        </p:txBody>
-      </p:sp>
-      <p:sp>
-        <p:nvSpPr>
-          <p:cNvPr id="12" name="Text 9"/>
-          <p:cNvSpPr/>
-          <p:nvPr/>
-        </p:nvSpPr>
-        <p:spPr>
-          <a:xfrm>
-            <a:off x="475488" y="4485155"/>
-            <a:ext cx="8229600" cy="320040"/>
-          </a:xfrm>
-          <a:prstGeom prst="rect">
-            <a:avLst/>
-          </a:prstGeom>
-          <a:noFill/>
-          <a:ln/>
-        </p:spPr>
-        <p:txBody>
-          <a:bodyPr wrap="square" lIns="0" tIns="0" rIns="0" bIns="0" rtlCol="0" anchor="ctr"/>
-          <a:lstStyle/>
-          <a:p>
-            <a:pPr marL="0" indent="0">
-              <a:buNone/>
-            </a:pPr>
-            <a:r>
-              <a:rPr lang="ca-ES" sz="1050" i="1" dirty="0">
-                <a:solidFill>
-                  <a:srgbClr val="5E6F80"/>
-                </a:solidFill>
-                <a:latin typeface="Calibri" pitchFamily="34" charset="0"/>
-                <a:ea typeface="Calibri" pitchFamily="34" charset="-122"/>
-                <a:cs typeface="Calibri" pitchFamily="34" charset="-120"/>
-              </a:rPr>
-              <a:t>El payload de 32 B del NRF24 equival exactament a 8 paraules ARINC 429 de 32 bits.</a:t>
-            </a:r>
-            <a:endParaRPr lang="ca-ES" sz="1050" dirty="0"/>
           </a:p>
         </p:txBody>
       </p:sp>
